--- a/lecons/F4/36_F4_M2_L26_Agriculture.pptx
+++ b/lecons/F4/36_F4_M2_L26_Agriculture.pptx
@@ -12846,7 +12846,7 @@
               <a:buNone/>
             </a:pPr>
             <a:r>
-              <a:rPr lang="en-US" sz="4000" b="1" dirty="0">
+              <a:rPr lang="en-US" sz="3200" b="1" dirty="0">
                 <a:solidFill>
                   <a:srgbClr val="111111"/>
                 </a:solidFill>
@@ -12856,7 +12856,7 @@
               </a:rPr>
               <a:t>Topic: Managing Resources for Development through Economic Activities</a:t>
             </a:r>
-            <a:endParaRPr lang="en-US" sz="4000" dirty="0"/>
+            <a:endParaRPr lang="en-US" sz="3200" dirty="0"/>
           </a:p>
           <a:p>
             <a:pPr algn="l" indent="0" marL="0">
@@ -12866,7 +12866,7 @@
               <a:buNone/>
             </a:pPr>
             <a:r>
-              <a:rPr lang="en-US" sz="4000" b="1" dirty="0">
+              <a:rPr lang="en-US" sz="3200" b="1" dirty="0">
                 <a:solidFill>
                   <a:srgbClr val="111111"/>
                 </a:solidFill>
@@ -12876,7 +12876,7 @@
               </a:rPr>
               <a:t>Sub-topic: Agriculture as an Economic Activity of the Primary Sector</a:t>
             </a:r>
-            <a:endParaRPr lang="en-US" sz="4000" dirty="0"/>
+            <a:endParaRPr lang="en-US" sz="3200" dirty="0"/>
           </a:p>
           <a:p>
             <a:pPr algn="l" indent="0" marL="0">
@@ -12886,7 +12886,7 @@
               <a:buNone/>
             </a:pPr>
             <a:r>
-              <a:rPr lang="en-US" sz="4000" b="1" dirty="0">
+              <a:rPr lang="en-US" sz="3200" b="1" dirty="0">
                 <a:solidFill>
                   <a:srgbClr val="990011"/>
                 </a:solidFill>
@@ -12896,7 +12896,7 @@
               </a:rPr>
               <a:t>Lesson 26: Agriculture</a:t>
             </a:r>
-            <a:endParaRPr lang="en-US" sz="4000" dirty="0"/>
+            <a:endParaRPr lang="en-US" sz="3200" dirty="0"/>
           </a:p>
         </p:txBody>
       </p:sp>
